--- a/cursos/recursos/los-cimientos-del-ajedrez/21-combinaciones-con-peones.pptx
+++ b/cursos/recursos/los-cimientos-del-ajedrez/21-combinaciones-con-peones.pptx
@@ -3434,7 +3434,7 @@
                 </a:solidFill>
                 <a:latin typeface="Calibri"/>
               </a:rPr>
-              <a:t>El peón también da golpes: horquillas, rupturas y avances con amenaza. Aprende a usar la pieza más barata como arma táctica.</a:t>
+              <a:t>El peón también da golpes: tenedores, rupturas y avances con amenaza. Aprende a usar la pieza más barata como arma táctica.</a:t>
             </a:r>
           </a:p>
         </p:txBody>
@@ -3711,7 +3711,7 @@
                 </a:solidFill>
                 <a:latin typeface="Calibri"/>
               </a:rPr>
-              <a:t>El peón es la pieza que menos vale, y justamente por eso es un arma táctica temible: cualquier pieza que ataque está en peligro, porque cambiarla por un peón es perder. La horquilla de peón, que ataca dos piezas en diagonal a la vez, gana material casi siempre. El avance de un peón que ataca una pieza también sirve para ganar tiempos o echar a una pieza de una buena casilla. Y en el final, las rupturas de peones crean un peón pasado de la nada.</a:t>
+              <a:t>El peón es la pieza que menos vale, y justamente por eso es un arma táctica temible: cualquier pieza que ataque está en peligro, porque cambiarla por un peón es perder. El tenedor de peón, que ataca dos piezas en diagonal a la vez, gana material casi siempre. El avance de un peón que ataca una pieza también sirve para ganar tiempos o echar a una pieza de una buena casilla. Y en el final, las rupturas de peones crean un peón pasado de la nada.</a:t>
             </a:r>
           </a:p>
         </p:txBody>
